--- a/mobileアプリ資料.pptx
+++ b/mobileアプリ資料.pptx
@@ -12,6 +12,7 @@
     <p:sldId id="260" r:id="rId6"/>
     <p:sldId id="265" r:id="rId7"/>
     <p:sldId id="261" r:id="rId8"/>
+    <p:sldId id="266" r:id="rId9"/>
   </p:sldIdLst>
   <p:sldSz cx="12192000" cy="6858000"/>
   <p:notesSz cx="6858000" cy="9144000"/>
@@ -110,6 +111,11 @@
       </a:defRPr>
     </a:lvl9pPr>
   </p:defaultTextStyle>
+  <p:extLst>
+    <p:ext uri="{EFAFB233-063F-42B5-8137-9DF3F51BA10A}">
+      <p15:sldGuideLst xmlns:p15="http://schemas.microsoft.com/office/powerpoint/2012/main"/>
+    </p:ext>
+  </p:extLst>
 </p:presentation>
 </file>
 
@@ -260,7 +266,7 @@
           <a:p>
             <a:fld id="{1FA684D6-C116-4B88-A091-87E1D0234432}" type="datetimeFigureOut">
               <a:rPr kumimoji="1" lang="ja-JP" altLang="en-US" smtClean="0"/>
-              <a:t>2026/5/20</a:t>
+              <a:t>2026/5/27</a:t>
             </a:fld>
             <a:endParaRPr kumimoji="1" lang="ja-JP" altLang="en-US"/>
           </a:p>
@@ -490,7 +496,7 @@
           <a:p>
             <a:fld id="{1FA684D6-C116-4B88-A091-87E1D0234432}" type="datetimeFigureOut">
               <a:rPr kumimoji="1" lang="ja-JP" altLang="en-US" smtClean="0"/>
-              <a:t>2026/5/20</a:t>
+              <a:t>2026/5/27</a:t>
             </a:fld>
             <a:endParaRPr kumimoji="1" lang="ja-JP" altLang="en-US"/>
           </a:p>
@@ -730,7 +736,7 @@
           <a:p>
             <a:fld id="{1FA684D6-C116-4B88-A091-87E1D0234432}" type="datetimeFigureOut">
               <a:rPr kumimoji="1" lang="ja-JP" altLang="en-US" smtClean="0"/>
-              <a:t>2026/5/20</a:t>
+              <a:t>2026/5/27</a:t>
             </a:fld>
             <a:endParaRPr kumimoji="1" lang="ja-JP" altLang="en-US"/>
           </a:p>
@@ -960,7 +966,7 @@
           <a:p>
             <a:fld id="{1FA684D6-C116-4B88-A091-87E1D0234432}" type="datetimeFigureOut">
               <a:rPr kumimoji="1" lang="ja-JP" altLang="en-US" smtClean="0"/>
-              <a:t>2026/5/20</a:t>
+              <a:t>2026/5/27</a:t>
             </a:fld>
             <a:endParaRPr kumimoji="1" lang="ja-JP" altLang="en-US"/>
           </a:p>
@@ -1235,7 +1241,7 @@
           <a:p>
             <a:fld id="{1FA684D6-C116-4B88-A091-87E1D0234432}" type="datetimeFigureOut">
               <a:rPr kumimoji="1" lang="ja-JP" altLang="en-US" smtClean="0"/>
-              <a:t>2026/5/20</a:t>
+              <a:t>2026/5/27</a:t>
             </a:fld>
             <a:endParaRPr kumimoji="1" lang="ja-JP" altLang="en-US"/>
           </a:p>
@@ -1564,7 +1570,7 @@
           <a:p>
             <a:fld id="{1FA684D6-C116-4B88-A091-87E1D0234432}" type="datetimeFigureOut">
               <a:rPr kumimoji="1" lang="ja-JP" altLang="en-US" smtClean="0"/>
-              <a:t>2026/5/20</a:t>
+              <a:t>2026/5/27</a:t>
             </a:fld>
             <a:endParaRPr kumimoji="1" lang="ja-JP" altLang="en-US"/>
           </a:p>
@@ -2040,7 +2046,7 @@
           <a:p>
             <a:fld id="{1FA684D6-C116-4B88-A091-87E1D0234432}" type="datetimeFigureOut">
               <a:rPr kumimoji="1" lang="ja-JP" altLang="en-US" smtClean="0"/>
-              <a:t>2026/5/20</a:t>
+              <a:t>2026/5/27</a:t>
             </a:fld>
             <a:endParaRPr kumimoji="1" lang="ja-JP" altLang="en-US"/>
           </a:p>
@@ -2181,7 +2187,7 @@
           <a:p>
             <a:fld id="{1FA684D6-C116-4B88-A091-87E1D0234432}" type="datetimeFigureOut">
               <a:rPr kumimoji="1" lang="ja-JP" altLang="en-US" smtClean="0"/>
-              <a:t>2026/5/20</a:t>
+              <a:t>2026/5/27</a:t>
             </a:fld>
             <a:endParaRPr kumimoji="1" lang="ja-JP" altLang="en-US"/>
           </a:p>
@@ -2294,7 +2300,7 @@
           <a:p>
             <a:fld id="{1FA684D6-C116-4B88-A091-87E1D0234432}" type="datetimeFigureOut">
               <a:rPr kumimoji="1" lang="ja-JP" altLang="en-US" smtClean="0"/>
-              <a:t>2026/5/20</a:t>
+              <a:t>2026/5/27</a:t>
             </a:fld>
             <a:endParaRPr kumimoji="1" lang="ja-JP" altLang="en-US"/>
           </a:p>
@@ -2637,7 +2643,7 @@
           <a:p>
             <a:fld id="{1FA684D6-C116-4B88-A091-87E1D0234432}" type="datetimeFigureOut">
               <a:rPr kumimoji="1" lang="ja-JP" altLang="en-US" smtClean="0"/>
-              <a:t>2026/5/20</a:t>
+              <a:t>2026/5/27</a:t>
             </a:fld>
             <a:endParaRPr kumimoji="1" lang="ja-JP" altLang="en-US"/>
           </a:p>
@@ -2925,7 +2931,7 @@
           <a:p>
             <a:fld id="{1FA684D6-C116-4B88-A091-87E1D0234432}" type="datetimeFigureOut">
               <a:rPr kumimoji="1" lang="ja-JP" altLang="en-US" smtClean="0"/>
-              <a:t>2026/5/20</a:t>
+              <a:t>2026/5/27</a:t>
             </a:fld>
             <a:endParaRPr kumimoji="1" lang="ja-JP" altLang="en-US"/>
           </a:p>
@@ -3198,7 +3204,7 @@
           <a:p>
             <a:fld id="{1FA684D6-C116-4B88-A091-87E1D0234432}" type="datetimeFigureOut">
               <a:rPr kumimoji="1" lang="ja-JP" altLang="en-US" smtClean="0"/>
-              <a:t>2026/5/20</a:t>
+              <a:t>2026/5/27</a:t>
             </a:fld>
             <a:endParaRPr kumimoji="1" lang="ja-JP" altLang="en-US"/>
           </a:p>
@@ -4665,7 +4671,7 @@
           <a:p>
             <a:r>
               <a:rPr lang="ja-JP" altLang="en-US" sz="2000" dirty="0"/>
-              <a:t>〇計算ロジック</a:t>
+              <a:t>〇計算</a:t>
             </a:r>
           </a:p>
           <a:p>
@@ -4785,6 +4791,135 @@
     <p:extLst>
       <p:ext uri="{BB962C8B-B14F-4D97-AF65-F5344CB8AC3E}">
         <p14:creationId xmlns:p14="http://schemas.microsoft.com/office/powerpoint/2010/main" val="4040553313"/>
+      </p:ext>
+    </p:extLst>
+  </p:cSld>
+  <p:clrMapOvr>
+    <a:masterClrMapping/>
+  </p:clrMapOvr>
+</p:sld>
+</file>
+
+<file path=ppt/slides/slide8.xml><?xml version="1.0" encoding="utf-8"?>
+<p:sld xmlns:a="http://schemas.openxmlformats.org/drawingml/2006/main" xmlns:r="http://schemas.openxmlformats.org/officeDocument/2006/relationships" xmlns:p="http://schemas.openxmlformats.org/presentationml/2006/main">
+  <p:cSld>
+    <p:spTree>
+      <p:nvGrpSpPr>
+        <p:cNvPr id="1" name=""/>
+        <p:cNvGrpSpPr/>
+        <p:nvPr/>
+      </p:nvGrpSpPr>
+      <p:grpSpPr>
+        <a:xfrm>
+          <a:off x="0" y="0"/>
+          <a:ext cx="0" cy="0"/>
+          <a:chOff x="0" y="0"/>
+          <a:chExt cx="0" cy="0"/>
+        </a:xfrm>
+      </p:grpSpPr>
+      <p:sp>
+        <p:nvSpPr>
+          <p:cNvPr id="2" name="テキスト ボックス 1">
+            <a:extLst>
+              <a:ext uri="{FF2B5EF4-FFF2-40B4-BE49-F238E27FC236}">
+                <a16:creationId xmlns:a16="http://schemas.microsoft.com/office/drawing/2014/main" id="{6D28E644-B34D-E3F0-6BB5-02CCFF11A599}"/>
+              </a:ext>
+            </a:extLst>
+          </p:cNvPr>
+          <p:cNvSpPr txBox="1"/>
+          <p:nvPr/>
+        </p:nvSpPr>
+        <p:spPr>
+          <a:xfrm>
+            <a:off x="1005840" y="822960"/>
+            <a:ext cx="6044184" cy="523220"/>
+          </a:xfrm>
+          <a:prstGeom prst="rect">
+            <a:avLst/>
+          </a:prstGeom>
+          <a:noFill/>
+        </p:spPr>
+        <p:txBody>
+          <a:bodyPr wrap="square" rtlCol="0">
+            <a:spAutoFit/>
+          </a:bodyPr>
+          <a:lstStyle/>
+          <a:p>
+            <a:r>
+              <a:rPr lang="ja-JP" altLang="en-US" sz="2800" b="1" dirty="0"/>
+              <a:t>■</a:t>
+            </a:r>
+            <a:r>
+              <a:rPr kumimoji="1" lang="ja-JP" altLang="en-US" sz="2800" b="1" dirty="0"/>
+              <a:t>追加するかもしれない機能</a:t>
+            </a:r>
+          </a:p>
+        </p:txBody>
+      </p:sp>
+      <p:sp>
+        <p:nvSpPr>
+          <p:cNvPr id="3" name="テキスト ボックス 2">
+            <a:extLst>
+              <a:ext uri="{FF2B5EF4-FFF2-40B4-BE49-F238E27FC236}">
+                <a16:creationId xmlns:a16="http://schemas.microsoft.com/office/drawing/2014/main" id="{12C90807-8FD5-FB0F-0FF4-8F67F718BEBA}"/>
+              </a:ext>
+            </a:extLst>
+          </p:cNvPr>
+          <p:cNvSpPr txBox="1"/>
+          <p:nvPr/>
+        </p:nvSpPr>
+        <p:spPr>
+          <a:xfrm>
+            <a:off x="1005840" y="1719072"/>
+            <a:ext cx="10442448" cy="1938992"/>
+          </a:xfrm>
+          <a:prstGeom prst="rect">
+            <a:avLst/>
+          </a:prstGeom>
+          <a:noFill/>
+        </p:spPr>
+        <p:txBody>
+          <a:bodyPr wrap="square" rtlCol="0">
+            <a:spAutoFit/>
+          </a:bodyPr>
+          <a:lstStyle/>
+          <a:p>
+            <a:r>
+              <a:rPr kumimoji="1" lang="ja-JP" altLang="en-US" sz="2400" dirty="0"/>
+              <a:t>〇退勤した際にボタン押したらカレンダーに退勤時間をメモしてくれる</a:t>
+            </a:r>
+            <a:endParaRPr kumimoji="1" lang="en-US" altLang="ja-JP" sz="2400" dirty="0"/>
+          </a:p>
+          <a:p>
+            <a:r>
+              <a:rPr lang="ja-JP" altLang="en-US" sz="2400" dirty="0"/>
+              <a:t>→ボタンはホーム画面とかに追加</a:t>
+            </a:r>
+            <a:endParaRPr lang="en-US" altLang="ja-JP" sz="2400" dirty="0"/>
+          </a:p>
+          <a:p>
+            <a:r>
+              <a:rPr lang="ja-JP" altLang="en-US" sz="2400" dirty="0"/>
+              <a:t>→</a:t>
+            </a:r>
+            <a:endParaRPr lang="en-US" altLang="ja-JP" sz="2400" dirty="0"/>
+          </a:p>
+          <a:p>
+            <a:endParaRPr kumimoji="1" lang="en-US" altLang="ja-JP" sz="2400" dirty="0"/>
+          </a:p>
+          <a:p>
+            <a:r>
+              <a:rPr lang="ja-JP" altLang="en-US" sz="2400" dirty="0"/>
+              <a:t>〇</a:t>
+            </a:r>
+            <a:endParaRPr kumimoji="1" lang="ja-JP" altLang="en-US" sz="2400" dirty="0"/>
+          </a:p>
+        </p:txBody>
+      </p:sp>
+    </p:spTree>
+    <p:extLst>
+      <p:ext uri="{BB962C8B-B14F-4D97-AF65-F5344CB8AC3E}">
+        <p14:creationId xmlns:p14="http://schemas.microsoft.com/office/powerpoint/2010/main" val="113287644"/>
       </p:ext>
     </p:extLst>
   </p:cSld>

--- a/mobileアプリ資料.pptx
+++ b/mobileアプリ資料.pptx
@@ -266,7 +266,7 @@
           <a:p>
             <a:fld id="{1FA684D6-C116-4B88-A091-87E1D0234432}" type="datetimeFigureOut">
               <a:rPr kumimoji="1" lang="ja-JP" altLang="en-US" smtClean="0"/>
-              <a:t>2026/5/27</a:t>
+              <a:t>2026/6/17</a:t>
             </a:fld>
             <a:endParaRPr kumimoji="1" lang="ja-JP" altLang="en-US"/>
           </a:p>
@@ -496,7 +496,7 @@
           <a:p>
             <a:fld id="{1FA684D6-C116-4B88-A091-87E1D0234432}" type="datetimeFigureOut">
               <a:rPr kumimoji="1" lang="ja-JP" altLang="en-US" smtClean="0"/>
-              <a:t>2026/5/27</a:t>
+              <a:t>2026/6/17</a:t>
             </a:fld>
             <a:endParaRPr kumimoji="1" lang="ja-JP" altLang="en-US"/>
           </a:p>
@@ -736,7 +736,7 @@
           <a:p>
             <a:fld id="{1FA684D6-C116-4B88-A091-87E1D0234432}" type="datetimeFigureOut">
               <a:rPr kumimoji="1" lang="ja-JP" altLang="en-US" smtClean="0"/>
-              <a:t>2026/5/27</a:t>
+              <a:t>2026/6/17</a:t>
             </a:fld>
             <a:endParaRPr kumimoji="1" lang="ja-JP" altLang="en-US"/>
           </a:p>
@@ -966,7 +966,7 @@
           <a:p>
             <a:fld id="{1FA684D6-C116-4B88-A091-87E1D0234432}" type="datetimeFigureOut">
               <a:rPr kumimoji="1" lang="ja-JP" altLang="en-US" smtClean="0"/>
-              <a:t>2026/5/27</a:t>
+              <a:t>2026/6/17</a:t>
             </a:fld>
             <a:endParaRPr kumimoji="1" lang="ja-JP" altLang="en-US"/>
           </a:p>
@@ -1241,7 +1241,7 @@
           <a:p>
             <a:fld id="{1FA684D6-C116-4B88-A091-87E1D0234432}" type="datetimeFigureOut">
               <a:rPr kumimoji="1" lang="ja-JP" altLang="en-US" smtClean="0"/>
-              <a:t>2026/5/27</a:t>
+              <a:t>2026/6/17</a:t>
             </a:fld>
             <a:endParaRPr kumimoji="1" lang="ja-JP" altLang="en-US"/>
           </a:p>
@@ -1570,7 +1570,7 @@
           <a:p>
             <a:fld id="{1FA684D6-C116-4B88-A091-87E1D0234432}" type="datetimeFigureOut">
               <a:rPr kumimoji="1" lang="ja-JP" altLang="en-US" smtClean="0"/>
-              <a:t>2026/5/27</a:t>
+              <a:t>2026/6/17</a:t>
             </a:fld>
             <a:endParaRPr kumimoji="1" lang="ja-JP" altLang="en-US"/>
           </a:p>
@@ -2046,7 +2046,7 @@
           <a:p>
             <a:fld id="{1FA684D6-C116-4B88-A091-87E1D0234432}" type="datetimeFigureOut">
               <a:rPr kumimoji="1" lang="ja-JP" altLang="en-US" smtClean="0"/>
-              <a:t>2026/5/27</a:t>
+              <a:t>2026/6/17</a:t>
             </a:fld>
             <a:endParaRPr kumimoji="1" lang="ja-JP" altLang="en-US"/>
           </a:p>
@@ -2187,7 +2187,7 @@
           <a:p>
             <a:fld id="{1FA684D6-C116-4B88-A091-87E1D0234432}" type="datetimeFigureOut">
               <a:rPr kumimoji="1" lang="ja-JP" altLang="en-US" smtClean="0"/>
-              <a:t>2026/5/27</a:t>
+              <a:t>2026/6/17</a:t>
             </a:fld>
             <a:endParaRPr kumimoji="1" lang="ja-JP" altLang="en-US"/>
           </a:p>
@@ -2300,7 +2300,7 @@
           <a:p>
             <a:fld id="{1FA684D6-C116-4B88-A091-87E1D0234432}" type="datetimeFigureOut">
               <a:rPr kumimoji="1" lang="ja-JP" altLang="en-US" smtClean="0"/>
-              <a:t>2026/5/27</a:t>
+              <a:t>2026/6/17</a:t>
             </a:fld>
             <a:endParaRPr kumimoji="1" lang="ja-JP" altLang="en-US"/>
           </a:p>
@@ -2643,7 +2643,7 @@
           <a:p>
             <a:fld id="{1FA684D6-C116-4B88-A091-87E1D0234432}" type="datetimeFigureOut">
               <a:rPr kumimoji="1" lang="ja-JP" altLang="en-US" smtClean="0"/>
-              <a:t>2026/5/27</a:t>
+              <a:t>2026/6/17</a:t>
             </a:fld>
             <a:endParaRPr kumimoji="1" lang="ja-JP" altLang="en-US"/>
           </a:p>
@@ -2931,7 +2931,7 @@
           <a:p>
             <a:fld id="{1FA684D6-C116-4B88-A091-87E1D0234432}" type="datetimeFigureOut">
               <a:rPr kumimoji="1" lang="ja-JP" altLang="en-US" smtClean="0"/>
-              <a:t>2026/5/27</a:t>
+              <a:t>2026/6/17</a:t>
             </a:fld>
             <a:endParaRPr kumimoji="1" lang="ja-JP" altLang="en-US"/>
           </a:p>
@@ -3204,7 +3204,7 @@
           <a:p>
             <a:fld id="{1FA684D6-C116-4B88-A091-87E1D0234432}" type="datetimeFigureOut">
               <a:rPr kumimoji="1" lang="ja-JP" altLang="en-US" smtClean="0"/>
-              <a:t>2026/5/27</a:t>
+              <a:t>2026/6/17</a:t>
             </a:fld>
             <a:endParaRPr kumimoji="1" lang="ja-JP" altLang="en-US"/>
           </a:p>
@@ -4467,8 +4467,8 @@
         </p:nvSpPr>
         <p:spPr>
           <a:xfrm>
-            <a:off x="907542" y="1349918"/>
-            <a:ext cx="10248138" cy="4893647"/>
+            <a:off x="971931" y="856357"/>
+            <a:ext cx="10248138" cy="6001643"/>
           </a:xfrm>
           <a:prstGeom prst="rect">
             <a:avLst/>
@@ -4544,6 +4544,23 @@
             <a:r>
               <a:rPr lang="ja-JP" altLang="en-US" sz="2400" dirty="0"/>
               <a:t>※勤務時間から自動で控除される</a:t>
+            </a:r>
+            <a:endParaRPr lang="en-US" altLang="ja-JP" sz="2400" dirty="0"/>
+          </a:p>
+          <a:p>
+            <a:endParaRPr lang="en-US" altLang="ja-JP" sz="2400" dirty="0"/>
+          </a:p>
+          <a:p>
+            <a:r>
+              <a:rPr lang="ja-JP" altLang="en-US" sz="2400" dirty="0"/>
+              <a:t>〇退勤した際にボタン押したらカレンダーに退勤時間をメモしてくれる</a:t>
+            </a:r>
+            <a:endParaRPr lang="en-US" altLang="ja-JP" sz="2400" dirty="0"/>
+          </a:p>
+          <a:p>
+            <a:r>
+              <a:rPr lang="ja-JP" altLang="en-US" sz="2400" dirty="0"/>
+              <a:t>→ボタンはホーム画面とかに追加</a:t>
             </a:r>
             <a:endParaRPr lang="en-US" altLang="ja-JP" sz="2400" dirty="0"/>
           </a:p>
@@ -4898,10 +4915,6 @@
             <a:endParaRPr lang="en-US" altLang="ja-JP" sz="2400" dirty="0"/>
           </a:p>
           <a:p>
-            <a:r>
-              <a:rPr lang="ja-JP" altLang="en-US" sz="2400" dirty="0"/>
-              <a:t>→</a:t>
-            </a:r>
             <a:endParaRPr lang="en-US" altLang="ja-JP" sz="2400" dirty="0"/>
           </a:p>
           <a:p>

--- a/mobileアプリ資料.pptx
+++ b/mobileアプリ資料.pptx
@@ -13,6 +13,7 @@
     <p:sldId id="265" r:id="rId7"/>
     <p:sldId id="261" r:id="rId8"/>
     <p:sldId id="266" r:id="rId9"/>
+    <p:sldId id="267" r:id="rId10"/>
   </p:sldIdLst>
   <p:sldSz cx="12192000" cy="6858000"/>
   <p:notesSz cx="6858000" cy="9144000"/>
@@ -4910,7 +4911,7 @@
           <a:p>
             <a:r>
               <a:rPr lang="ja-JP" altLang="en-US" sz="2400" dirty="0"/>
-              <a:t>→ボタンはホーム画面とかに追加</a:t>
+              <a:t>→ボタンはホーム画面とかに追加（追加済み）</a:t>
             </a:r>
             <a:endParaRPr lang="en-US" altLang="ja-JP" sz="2400" dirty="0"/>
           </a:p>
@@ -4933,6 +4934,141 @@
     <p:extLst>
       <p:ext uri="{BB962C8B-B14F-4D97-AF65-F5344CB8AC3E}">
         <p14:creationId xmlns:p14="http://schemas.microsoft.com/office/powerpoint/2010/main" val="113287644"/>
+      </p:ext>
+    </p:extLst>
+  </p:cSld>
+  <p:clrMapOvr>
+    <a:masterClrMapping/>
+  </p:clrMapOvr>
+</p:sld>
+</file>
+
+<file path=ppt/slides/slide9.xml><?xml version="1.0" encoding="utf-8"?>
+<p:sld xmlns:a="http://schemas.openxmlformats.org/drawingml/2006/main" xmlns:r="http://schemas.openxmlformats.org/officeDocument/2006/relationships" xmlns:p="http://schemas.openxmlformats.org/presentationml/2006/main">
+  <p:cSld>
+    <p:spTree>
+      <p:nvGrpSpPr>
+        <p:cNvPr id="1" name=""/>
+        <p:cNvGrpSpPr/>
+        <p:nvPr/>
+      </p:nvGrpSpPr>
+      <p:grpSpPr>
+        <a:xfrm>
+          <a:off x="0" y="0"/>
+          <a:ext cx="0" cy="0"/>
+          <a:chOff x="0" y="0"/>
+          <a:chExt cx="0" cy="0"/>
+        </a:xfrm>
+      </p:grpSpPr>
+      <p:sp>
+        <p:nvSpPr>
+          <p:cNvPr id="6" name="テキスト ボックス 5">
+            <a:extLst>
+              <a:ext uri="{FF2B5EF4-FFF2-40B4-BE49-F238E27FC236}">
+                <a16:creationId xmlns:a16="http://schemas.microsoft.com/office/drawing/2014/main" id="{7B42907A-861D-8F98-0FC5-619DB083C4F2}"/>
+              </a:ext>
+            </a:extLst>
+          </p:cNvPr>
+          <p:cNvSpPr txBox="1"/>
+          <p:nvPr/>
+        </p:nvSpPr>
+        <p:spPr>
+          <a:xfrm>
+            <a:off x="1005840" y="822960"/>
+            <a:ext cx="6044184" cy="523220"/>
+          </a:xfrm>
+          <a:prstGeom prst="rect">
+            <a:avLst/>
+          </a:prstGeom>
+          <a:noFill/>
+        </p:spPr>
+        <p:txBody>
+          <a:bodyPr wrap="square" rtlCol="0">
+            <a:spAutoFit/>
+          </a:bodyPr>
+          <a:lstStyle/>
+          <a:p>
+            <a:r>
+              <a:rPr lang="ja-JP" altLang="en-US" sz="2800" b="1" dirty="0"/>
+              <a:t>■未実装</a:t>
+            </a:r>
+            <a:r>
+              <a:rPr kumimoji="1" lang="ja-JP" altLang="en-US" sz="2800" b="1" dirty="0"/>
+              <a:t>機能</a:t>
+            </a:r>
+          </a:p>
+        </p:txBody>
+      </p:sp>
+      <p:sp>
+        <p:nvSpPr>
+          <p:cNvPr id="7" name="テキスト ボックス 6">
+            <a:extLst>
+              <a:ext uri="{FF2B5EF4-FFF2-40B4-BE49-F238E27FC236}">
+                <a16:creationId xmlns:a16="http://schemas.microsoft.com/office/drawing/2014/main" id="{85CBEBF9-67AC-2816-22C0-E118B5DCD8E1}"/>
+              </a:ext>
+            </a:extLst>
+          </p:cNvPr>
+          <p:cNvSpPr txBox="1"/>
+          <p:nvPr/>
+        </p:nvSpPr>
+        <p:spPr>
+          <a:xfrm>
+            <a:off x="1335024" y="1809851"/>
+            <a:ext cx="10442448" cy="2677656"/>
+          </a:xfrm>
+          <a:prstGeom prst="rect">
+            <a:avLst/>
+          </a:prstGeom>
+          <a:noFill/>
+        </p:spPr>
+        <p:txBody>
+          <a:bodyPr wrap="square" rtlCol="0">
+            <a:spAutoFit/>
+          </a:bodyPr>
+          <a:lstStyle/>
+          <a:p>
+            <a:r>
+              <a:rPr kumimoji="1" lang="ja-JP" altLang="en-US" sz="2400" dirty="0"/>
+              <a:t>〇交通費の計算</a:t>
+            </a:r>
+            <a:endParaRPr kumimoji="1" lang="en-US" altLang="ja-JP" sz="2400" dirty="0"/>
+          </a:p>
+          <a:p>
+            <a:endParaRPr lang="en-US" altLang="ja-JP" sz="2400" dirty="0"/>
+          </a:p>
+          <a:p>
+            <a:r>
+              <a:rPr kumimoji="1" lang="ja-JP" altLang="en-US" sz="2400" dirty="0"/>
+              <a:t>〇深夜の割増の計算</a:t>
+            </a:r>
+            <a:endParaRPr kumimoji="1" lang="en-US" altLang="ja-JP" sz="2400" dirty="0"/>
+          </a:p>
+          <a:p>
+            <a:endParaRPr lang="en-US" altLang="ja-JP" sz="2400" dirty="0"/>
+          </a:p>
+          <a:p>
+            <a:r>
+              <a:rPr kumimoji="1" lang="ja-JP" altLang="en-US" sz="2400" dirty="0"/>
+              <a:t>〇登録方法</a:t>
+            </a:r>
+            <a:endParaRPr kumimoji="1" lang="en-US" altLang="ja-JP" sz="2400" dirty="0"/>
+          </a:p>
+          <a:p>
+            <a:endParaRPr lang="en-US" altLang="ja-JP" sz="2400" dirty="0"/>
+          </a:p>
+          <a:p>
+            <a:r>
+              <a:rPr kumimoji="1" lang="ja-JP" altLang="en-US" sz="2400"/>
+              <a:t>〇掛け持ちしてる人のメリットがある機能△</a:t>
+            </a:r>
+            <a:endParaRPr kumimoji="1" lang="en-US" altLang="ja-JP" sz="2400" dirty="0"/>
+          </a:p>
+        </p:txBody>
+      </p:sp>
+    </p:spTree>
+    <p:extLst>
+      <p:ext uri="{BB962C8B-B14F-4D97-AF65-F5344CB8AC3E}">
+        <p14:creationId xmlns:p14="http://schemas.microsoft.com/office/powerpoint/2010/main" val="3386614561"/>
       </p:ext>
     </p:extLst>
   </p:cSld>
